--- a/deck/Nabd.pptx
+++ b/deck/Nabd.pptx
@@ -10301,7 +10301,7 @@
                 <a:ea typeface="Arial" pitchFamily="34" charset="-122"/>
                 <a:cs typeface="Arial" pitchFamily="34" charset="-120"/>
               </a:rPr>
-              <a:t>Analytical warehouse</a:t>
+              <a:t>Warehouse</a:t>
             </a:r>
             <a:endParaRPr lang="en-US" sz="1000" dirty="0"/>
           </a:p>
@@ -10343,7 +10343,7 @@
                 <a:ea typeface="Arial" pitchFamily="34" charset="-122"/>
                 <a:cs typeface="Arial" pitchFamily="34" charset="-120"/>
               </a:rPr>
-              <a:t>streaming export · curated marts · in-warehouse ML</a:t>
+              <a:t>analytical store · streaming export · curated marts · in-warehouse ML</a:t>
             </a:r>
             <a:endParaRPr lang="en-US" sz="750" dirty="0"/>
           </a:p>
@@ -12114,46 +12114,7 @@
       </p:sp>
       <p:sp>
         <p:nvSpPr>
-          <p:cNvPr id="78" name="Text 69"/>
-          <p:cNvSpPr txBox="1"/>
-          <p:nvPr/>
-        </p:nvSpPr>
-        <p:spPr>
-          <a:xfrm>
-            <a:off x="5760720" y="3547872"/>
-            <a:ext cx="868680" cy="182880"/>
-          </a:xfrm>
-          <a:prstGeom prst="rect">
-            <a:avLst/>
-          </a:prstGeom>
-          <a:noFill/>
-          <a:ln/>
-        </p:spPr>
-        <p:txBody>
-          <a:bodyPr wrap="square" lIns="0" tIns="0" rIns="0" bIns="0" rtlCol="0" anchor="t"/>
-          <a:lstStyle/>
-          <a:p>
-            <a:pPr algn="ctr" indent="0" marL="0">
-              <a:buNone/>
-            </a:pPr>
-            <a:r>
-              <a:rPr lang="en-US" sz="700" dirty="0">
-                <a:solidFill>
-                  <a:srgbClr val="1A73E8"/>
-                </a:solidFill>
-                <a:latin typeface="Arial" pitchFamily="34" charset="0"/>
-                <a:ea typeface="Arial" pitchFamily="34" charset="-122"/>
-                <a:cs typeface="Arial" pitchFamily="34" charset="-120"/>
-              </a:rPr>
-              <a:t>data and models</a:t>
-            </a:r>
-            <a:endParaRPr lang="en-US" sz="700" dirty="0"/>
-          </a:p>
-        </p:txBody>
-      </p:sp>
-      <p:sp>
-        <p:nvSpPr>
-          <p:cNvPr id="79" name="Shape 70"/>
+          <p:cNvPr id="78" name="Shape 69"/>
           <p:cNvSpPr/>
           <p:nvPr/>
         </p:nvSpPr>
@@ -12180,7 +12141,7 @@
       </p:sp>
       <p:pic>
         <p:nvPicPr>
-          <p:cNvPr id="80" name="Image 7" descr="preencoded.png">    </p:cNvPr>
+          <p:cNvPr id="79" name="Image 7" descr="preencoded.png">    </p:cNvPr>
           <p:cNvPicPr>
             <a:picLocks noChangeAspect="1"/>
           </p:cNvPicPr>
@@ -12204,7 +12165,7 @@
       </p:pic>
       <p:sp>
         <p:nvSpPr>
-          <p:cNvPr id="81" name="Text 71"/>
+          <p:cNvPr id="80" name="Text 70"/>
           <p:cNvSpPr txBox="1"/>
           <p:nvPr/>
         </p:nvSpPr>
@@ -12263,7 +12224,7 @@
       </p:sp>
       <p:sp>
         <p:nvSpPr>
-          <p:cNvPr id="82" name="Text 72"/>
+          <p:cNvPr id="81" name="Text 71"/>
           <p:cNvSpPr txBox="1"/>
           <p:nvPr/>
         </p:nvSpPr>
@@ -12302,7 +12263,7 @@
       </p:sp>
       <p:sp>
         <p:nvSpPr>
-          <p:cNvPr id="83" name="Text 73"/>
+          <p:cNvPr id="82" name="Text 72"/>
           <p:cNvSpPr txBox="1"/>
           <p:nvPr/>
         </p:nvSpPr>
@@ -12881,7 +12842,7 @@
                 <a:ea typeface="Arial" pitchFamily="34" charset="-122"/>
                 <a:cs typeface="Arial" pitchFamily="34" charset="-120"/>
               </a:rPr>
-              <a:t>App and API (serverless)</a:t>
+              <a:t>App and API</a:t>
             </a:r>
             <a:endParaRPr lang="en-US" sz="950" dirty="0"/>
           </a:p>
@@ -12923,7 +12884,7 @@
                 <a:ea typeface="Arial" pitchFamily="34" charset="-122"/>
                 <a:cs typeface="Arial" pitchFamily="34" charset="-120"/>
               </a:rPr>
-              <a:t>web front end · API · streams the agent trace to the browser</a:t>
+              <a:t>serverless web front end and API · streams the agent trace to the browser</a:t>
             </a:r>
             <a:endParaRPr lang="en-US" sz="750" dirty="0"/>
           </a:p>
@@ -13897,7 +13858,7 @@
                 <a:ea typeface="Arial" pitchFamily="34" charset="-122"/>
                 <a:cs typeface="Arial" pitchFamily="34" charset="-120"/>
               </a:rPr>
-              <a:t>Streaming export to the warehouse</a:t>
+              <a:t>Warehouse export</a:t>
             </a:r>
             <a:endParaRPr lang="en-US" sz="950" dirty="0"/>
           </a:p>

--- a/deck/Nabd.pptx
+++ b/deck/Nabd.pptx
@@ -862,7 +862,7 @@
           <a:p>
             <a:r>
               <a:rPr lang="en-US" dirty="0"/>
-              <a:t>Walk top to bottom once: question, supervisor, specialists, tools, evidence. Say out loud: the language model is Gemini Flash and the framework is the Agent Development Kit; on Google Cloud the data specialist is the MCP Toolbox over BigQuery, the guideline specialist is Vertex AI RAG Engine, the risk specialist is a Vertex AI endpoint. Pre-empt "why five agents": least privilege (the guideline agent cannot draft a prescription), independent evaluation (each specialist has its own test set), and cost (a flat agent re-reads every tool schema on every hop; the measurement is in the evaluation tab). The MCP specialist is the interesting one: Google ships MCP servers to read FHIR and to query BigQuery; none reasons about a population. We built that one.</a:t>
+              <a:t>Walk top to bottom once: question, supervisor, specialists, tools, evidence. Say out loud: the language model is Gemini Flash and the framework is the Agent Development Kit; on Google Cloud the data specialist is the MCP Toolbox over BigQuery, the guideline specialist is Vertex AI RAG Engine, the risk specialist is a Vertex AI endpoint. Pre-empt "why five agents": this is the orchestration pattern used in the prototype, not a settled production architecture. It demonstrates potential advantages of specialist separation: tool scoping (the guideline agent has no drafting tool; tool exposure, not a separate security identity), modular evaluation (each specialist has its own test set), and a measured prompt-size difference (a flat agent re-reads every tool schema on every hop; the measurement is in the evaluation tab). In discovery we would benchmark a single tool-calling agent, a supervisor/router and the specialist pattern against the customer's evalset before choosing the production topology. The MCP specialist is the interesting one: Google provides MCP connectivity to BigQuery and the FHIR store; Nabd adds the population-health operations on top.</a:t>
             </a:r>
             <a:endParaRPr lang="en-US" dirty="0"/>
           </a:p>
@@ -1038,7 +1038,7 @@
           <a:p>
             <a:r>
               <a:rPr lang="en-US" dirty="0"/>
-              <a:t>Read it left to right. Say the Google services out loud, box by box: the managed FHIR store is the Cloud Healthcare API; the warehouse is BigQuery with BigQuery ML; object storage is Cloud Storage; managed retrieval is Vertex AI RAG Engine; the model platform is Vertex AI (pipelines, Model Registry, online endpoint); the serverless app is Cloud Run; the agent runtime is the Agent Development Kit on Gemini, on Cloud Run in Doha until Agent Engine is available in me-central1; the data tools are the MCP Toolbox for BigQuery and FHIR; the queue lives in AlloyDB; write-back is a FHIR Task through the Healthcare API. Sovereignty: Assured Workloads with the Qatar data boundary, Cloud KMS keys, VPC Service Controls, Cloud Audit Logs; Gemini on the global endpoint on pseudonymised prompts only. This follows Google's own RAG reference architecture: an ingestion subsystem and a serving subsystem.</a:t>
+              <a:t>Read it left to right. Say the Google services out loud, box by box: the managed FHIR store is the Cloud Healthcare API; the warehouse is BigQuery with BigQuery ML; object storage is Cloud Storage; managed retrieval is Vertex AI RAG Engine; the model platform is Vertex AI (pipelines, Model Registry, online endpoint); the serverless app is Cloud Run; the agent runtime is the Agent Development Kit on Gemini, on Cloud Run in Doha until Agent Engine is available in me-central1; the data tools are the MCP Toolbox for BigQuery and FHIR; the queue lives in AlloyDB; write-back is a FHIR Task through the Healthcare API. Sovereignty: Assured Workloads with the Qatar data boundary, Cloud KMS keys, VPC Service Controls, Cloud Audit Logs; PHI and identifiable data stay inside the boundary, and the model endpoint and what may enter a prompt are agreed with the ministry's DPO and security team on supported regional processing; the demo uses synthetic data only. This follows Google's own RAG reference architecture: an ingestion subsystem and a serving subsystem.</a:t>
             </a:r>
             <a:endParaRPr lang="en-US" dirty="0"/>
           </a:p>
@@ -1126,7 +1126,7 @@
           <a:p>
             <a:r>
               <a:rPr lang="en-US" dirty="0"/>
-              <a:t>This slide exists for the technical questions. Say the Google names out loud: Identity-Aware Proxy in front, Cloud Run for the app and the agent, Gemini Flash via Vertex AI, sessions in AlloyDB, the MCP Toolbox over BigQuery, a Vertex AI endpoint, RAG Engine; the Cloud Healthcare API FHIR store, Pub/Sub events, BigQuery streaming export, Dataform marts, BigQuery ML batch scoring; Terraform, Cloud Build, Artifact Registry, Cloud Logging, Cloud Trace, Cloud Monitoring. Top lane: one question is one synchronous path, five hops, streamed. Middle lane: population numbers are batch, rebuilt nightly, because they move over weeks; only the per-patient signal is event-driven. Bottom lane: a zone failure is invisible by construction because every service is regional and zone-redundant in me-central1; a region failure is the honest limit of in-country residency, so recovery is in-region with a stated RPO and RTO; Gemini saturation degrades to the scripted engine, which the demo can show.</a:t>
+              <a:t>This slide exists for the technical questions. Say the Google names out loud: Identity-Aware Proxy in front, Cloud Run for the app and the agent, Gemini Flash via Vertex AI, sessions in AlloyDB, the MCP Toolbox over BigQuery, a Vertex AI endpoint, RAG Engine; the Cloud Healthcare API FHIR store, Pub/Sub events, BigQuery streaming export, Dataform marts, BigQuery ML batch scoring; Terraform, Cloud Build, Artifact Registry, Cloud Logging, Cloud Trace, Cloud Monitoring. Top lane: one question is one synchronous path, five hops, streamed. Middle lane: population numbers are batch, rebuilt nightly, because they move over weeks; only the per-patient signal is event-driven. Bottom lane: for zonal resilience we would use regional managed services and validate each service's HA characteristics against the customer's SLOs; a regional outage is the honest trade-off of strict in-country residency, so in discovery we agree the required RPO and RTO and whether policy permits a compliant secondary recovery location, and if cross-region replication is prohibited a complete regional outage is an accepted dependency on restoration of the Qatar region; model saturation degrades to the direct tool path, which the demo can show.</a:t>
             </a:r>
             <a:endParaRPr lang="en-US" dirty="0"/>
           </a:p>
@@ -4866,7 +4866,7 @@
                 <a:ea typeface="Arial" pitchFamily="34" charset="-122"/>
                 <a:cs typeface="Arial" pitchFamily="34" charset="-120"/>
               </a:rPr>
-              <a:t>Population and cost simulation</a:t>
+              <a:t>Population view and risk scenarios</a:t>
             </a:r>
             <a:endParaRPr lang="en-US" sz="1250" dirty="0"/>
           </a:p>
@@ -4908,7 +4908,7 @@
                 <a:ea typeface="Arial" pitchFamily="34" charset="-122"/>
                 <a:cs typeface="Arial" pitchFamily="34" charset="-120"/>
               </a:rPr>
-              <a:t>Control rates, care gaps and cost by facility and nationality; what-if simulation of programmes before money is spent.</a:t>
+              <a:t>Control rates, care gaps and cost by facility and population group; predictive risk scenarios that show where the model is most sensitive to which inputs.</a:t>
             </a:r>
             <a:endParaRPr lang="en-US" sz="1050" dirty="0"/>
           </a:p>
@@ -5682,7 +5682,7 @@
                 <a:ea typeface="Arial" pitchFamily="34" charset="-122"/>
                 <a:cs typeface="Arial" pitchFamily="34" charset="-120"/>
               </a:rPr>
-              <a:t>How it works: one supervisor, five specialists</a:t>
+              <a:t>How it works in the prototype: a supervisor and five specialists</a:t>
             </a:r>
             <a:endParaRPr lang="en-US" sz="2600" dirty="0"/>
           </a:p>
@@ -5721,7 +5721,7 @@
                 <a:ea typeface="Arial" pitchFamily="34" charset="-122"/>
                 <a:cs typeface="Arial" pitchFamily="34" charset="-120"/>
               </a:rPr>
-              <a:t>Each specialist carries only the tools it needs. The supervisor plans and composes; it never produces a number itself.</a:t>
+              <a:t>The orchestration pattern used in this prototype. Each specialist sees only its own tools; the production topology is benchmarked during discovery.</a:t>
             </a:r>
             <a:endParaRPr lang="en-US" sz="1300" dirty="0"/>
           </a:p>
@@ -6729,7 +6729,7 @@
                 <a:ea typeface="Arial" pitchFamily="34" charset="-122"/>
                 <a:cs typeface="Arial" pitchFamily="34" charset="-120"/>
               </a:rPr>
-              <a:t>Scores, explains, forecasts, simulates</a:t>
+              <a:t>Scores, explains, forecasts, runs risk scenarios</a:t>
             </a:r>
             <a:endParaRPr lang="en-US" sz="1000" dirty="0"/>
           </a:p>
@@ -6771,7 +6771,7 @@
                 <a:ea typeface="Arial" pitchFamily="34" charset="-122"/>
                 <a:cs typeface="Arial" pitchFamily="34" charset="-120"/>
               </a:rPr>
-              <a:t>XGBoost risk model (AUC 0.85) · segments · forecast</a:t>
+              <a:t>XGBoost risk model (AUC 0.85, synthetic held-out) · segments · forecast</a:t>
             </a:r>
             <a:endParaRPr lang="en-US" sz="900" dirty="0"/>
           </a:p>
@@ -7283,7 +7283,7 @@
                 <a:ea typeface="Arial" pitchFamily="34" charset="-122"/>
                 <a:cs typeface="Arial" pitchFamily="34" charset="-120"/>
               </a:rPr>
-              <a:t>Drafts prescriptions, recalls, referrals</a:t>
+              <a:t>Drafts review tasks, recalls, referrals</a:t>
             </a:r>
             <a:endParaRPr lang="en-US" sz="1000" dirty="0"/>
           </a:p>
@@ -11554,7 +11554,7 @@
                 <a:ea typeface="Arial" pitchFamily="34" charset="-122"/>
                 <a:cs typeface="Arial" pitchFamily="34" charset="-120"/>
               </a:rPr>
-              <a:t>care gaps · measures · simulation</a:t>
+              <a:t>care gaps · measures · risk scenarios</a:t>
             </a:r>
             <a:endParaRPr lang="en-US" sz="750" dirty="0"/>
           </a:p>
@@ -12216,7 +12216,7 @@
                 <a:ea typeface="Arial" pitchFamily="34" charset="-122"/>
                 <a:cs typeface="Arial" pitchFamily="34" charset="-120"/>
               </a:rPr>
-              <a:t>PHI at rest in country under a compliance boundary · customer-managed encryption keys · a network perimeter around the data services · least-privilege service identities · audit logs on every access · the language model sees pseudonymised prompts only.</a:t>
+              <a:t>PHI at rest in country under a compliance boundary · customer-managed encryption keys · a network perimeter around the data services · least-privilege service identities · audit logs on every access · model endpoint and prompt content agreed with the ministry's data-protection office.</a:t>
             </a:r>
             <a:endParaRPr lang="en-US" sz="900" dirty="0"/>
           </a:p>
@@ -12400,7 +12400,7 @@
                 <a:ea typeface="Arial" pitchFamily="34" charset="-122"/>
                 <a:cs typeface="Arial" pitchFamily="34" charset="-120"/>
               </a:rPr>
-              <a:t>Synchronous per question; batch per population; every component regional, in country, and zone-redundant.</a:t>
+              <a:t>Synchronous per question; batch per population; regional managed services in country, with resilience validated against the customer's SLOs.</a:t>
             </a:r>
             <a:endParaRPr lang="en-US" sz="1300" dirty="0"/>
           </a:p>
@@ -14478,7 +14478,7 @@
                 <a:ea typeface="Arial" pitchFamily="34" charset="-122"/>
                 <a:cs typeface="Arial" pitchFamily="34" charset="-120"/>
               </a:rPr>
-              <a:t>A zone fails</a:t>
+              <a:t>Zonal resilience</a:t>
             </a:r>
             <a:endParaRPr lang="en-US" sz="950" dirty="0"/>
           </a:p>
@@ -14520,7 +14520,7 @@
                 <a:ea typeface="Arial" pitchFamily="34" charset="-122"/>
                 <a:cs typeface="Arial" pitchFamily="34" charset="-120"/>
               </a:rPr>
-              <a:t>Every managed service is regional and zone-redundant: app, warehouse, FHIR store, database. Traffic re-routes, no data loss, nobody is paged.</a:t>
+              <a:t>Regional managed services for the app, warehouse, FHIR store and database; service-specific HA characteristics validated against the customer's SLOs.</a:t>
             </a:r>
             <a:endParaRPr lang="en-US" sz="750" dirty="0"/>
           </a:p>
@@ -14586,7 +14586,7 @@
                 <a:ea typeface="Arial" pitchFamily="34" charset="-122"/>
                 <a:cs typeface="Arial" pitchFamily="34" charset="-120"/>
               </a:rPr>
-              <a:t>The region fails</a:t>
+              <a:t>Regional outage: an explicit trade-off</a:t>
             </a:r>
             <a:endParaRPr lang="en-US" sz="950" dirty="0"/>
           </a:p>
@@ -14628,7 +14628,7 @@
                 <a:ea typeface="Arial" pitchFamily="34" charset="-122"/>
                 <a:cs typeface="Arial" pitchFamily="34" charset="-120"/>
               </a:rPr>
-              <a:t>Residency rules keep data in country, so recovery is in-region: warehouse time travel, database and storage backups. Stated RPO 24 h, RTO 4 h.</a:t>
+              <a:t>Strict in-country residency limits recovery options. RPO and RTO are agreed in discovery, with whether policy permits a compliant secondary recovery location.</a:t>
             </a:r>
             <a:endParaRPr lang="en-US" sz="750" dirty="0"/>
           </a:p>
@@ -14736,7 +14736,7 @@
                 <a:ea typeface="Arial" pitchFamily="34" charset="-122"/>
                 <a:cs typeface="Arial" pitchFamily="34" charset="-120"/>
               </a:rPr>
-              <a:t>The supervisor moves down a tested model list; if no model answers, the scripted engine runs the same tools without the language model.</a:t>
+              <a:t>The supervisor moves down a tested model list; if no model answers, the same tools run directly without the language model.</a:t>
             </a:r>
             <a:endParaRPr lang="en-US" sz="750" dirty="0"/>
           </a:p>
@@ -15173,7 +15173,7 @@
                 <a:ea typeface="Arial" pitchFamily="34" charset="-122"/>
                 <a:cs typeface="Arial" pitchFamily="34" charset="-120"/>
               </a:rPr>
-              <a:t>A panel briefing, then one patient: the 360 view, an explained risk score, the guideline passage, and a draft prescription that waits for her signature. Then the what-if simulator on the same patient.</a:t>
+              <a:t>A panel briefing, then one patient: the 360 view, an explained risk score, the guideline passage, and a clinician review task that waits for her signature. Then the risk sensitivity simulator on the same patient.</a:t>
             </a:r>
             <a:endParaRPr lang="en-US" sz="1050" dirty="0"/>
           </a:p>
@@ -15276,7 +15276,7 @@
                 <a:ea typeface="Arial" pitchFamily="34" charset="-122"/>
                 <a:cs typeface="Arial" pitchFamily="34" charset="-120"/>
               </a:rPr>
-              <a:t>The ministry's view</a:t>
+              <a:t>The population view</a:t>
             </a:r>
             <a:endParaRPr lang="en-US" sz="1400" dirty="0"/>
           </a:p>
@@ -15318,7 +15318,7 @@
                 <a:ea typeface="Arial" pitchFamily="34" charset="-122"/>
                 <a:cs typeface="Arial" pitchFamily="34" charset="-120"/>
               </a:rPr>
-              <a:t>The national picture: control rates, care gaps by facility and nationality, cost concentration, and a simulation of five programmes before any money is spent.</a:t>
+              <a:t>Control rates, care gaps by facility and population group, cost concentration, and predictive risk scenarios that show where the model's estimate is most sensitive.</a:t>
             </a:r>
             <a:endParaRPr lang="en-US" sz="1050" dirty="0"/>
           </a:p>

--- a/deck/Nabd.pptx
+++ b/deck/Nabd.pptx
@@ -1038,7 +1038,7 @@
           <a:p>
             <a:r>
               <a:rPr lang="en-US" dirty="0"/>
-              <a:t>Read it left to right. Say the Google services out loud, box by box: the managed FHIR store is the Cloud Healthcare API; the warehouse is BigQuery with BigQuery ML; object storage is Cloud Storage; managed retrieval is Vertex AI RAG Engine; the model platform is Vertex AI (pipelines, Model Registry, online endpoint); the serverless app is Cloud Run; the agent runtime is the Agent Development Kit on Gemini, on Cloud Run in Doha until Agent Engine is available in me-central1; the data tools are the MCP Toolbox for BigQuery and FHIR; the queue lives in AlloyDB; write-back is a FHIR Task through the Healthcare API. Sovereignty: Assured Workloads with the Qatar data boundary, Cloud KMS keys, VPC Service Controls, Cloud Audit Logs; PHI and identifiable data stay inside the boundary, and the model endpoint and what may enter a prompt are agreed with the ministry's DPO and security team on supported regional processing; the demo uses synthetic data only. This follows Google's own RAG reference architecture: an ingestion subsystem and a serving subsystem.</a:t>
+              <a:t>Read it left to right. Say the Google services out loud, box by box: the managed FHIR store is the Cloud Healthcare API; the warehouse is BigQuery with BigQuery ML; object storage is Cloud Storage; managed retrieval is Vertex AI RAG Engine; the model platform is Vertex AI (pipelines, Model Registry, online endpoint); the serverless app is Cloud Run; the agent runtime is the Agent Development Kit on Gemini, on Cloud Run in Doha, with a managed agent runtime where supported and approved; the data tools are the MCP Toolbox for BigQuery and FHIR; the queue lives in AlloyDB; write-back is a FHIR Task through the Healthcare API. Sovereignty: Assured Workloads with the Qatar data boundary, Cloud KMS keys, VPC Service Controls, Cloud Audit Logs; PHI and identifiable data stay inside the boundary, and the model endpoint and what may enter a prompt are agreed with the ministry's DPO and security team on supported regional processing; the demo uses synthetic data only. This follows Google's own RAG reference architecture: an ingestion subsystem and a serving subsystem.</a:t>
             </a:r>
             <a:endParaRPr lang="en-US" dirty="0"/>
           </a:p>
@@ -1214,7 +1214,7 @@
           <a:p>
             <a:r>
               <a:rPr lang="en-US" dirty="0"/>
-              <a:t>Close the deck by making the demo the proof: three acts, twenty minutes, every number computed live. The right-hand table is where you name the Google services out loud, one per row: BigQuery fed by the Cloud Healthcare API; Vertex AI RAG Engine; BigQuery ML or Vertex AI training with an online endpoint; ADK on Cloud Run in Doha, Agent Engine when it is available in region; Cloud Run beside the MCP Toolbox; AlloyDB and FHIR Tasks through the Healthcare API; Speech-to-Text and Text-to-Speech; the Gen AI Evaluation Service with Gemini Pro as judge in Cloud Build. Then switch to the browser.</a:t>
+              <a:t>Close the deck by making the demo the proof: three acts, twenty minutes, every number computed live. The right-hand table is where you name the Google services out loud, one per row: BigQuery fed by the Cloud Healthcare API; Vertex AI RAG Engine; BigQuery ML or Vertex AI training with an online endpoint; ADK on Cloud Run in Doha, a managed agent runtime where supported and approved; Cloud Run beside the MCP Toolbox; AlloyDB and FHIR Tasks through the Healthcare API; Speech-to-Text and Text-to-Speech; the Gen AI Evaluation Service with Gemini Pro as judge in Cloud Build. Then switch to the browser.</a:t>
             </a:r>
             <a:endParaRPr lang="en-US" dirty="0"/>
           </a:p>

--- a/deck/Nabd.pptx
+++ b/deck/Nabd.pptx
@@ -6494,7 +6494,7 @@
                 <a:ea typeface="Arial" pitchFamily="34" charset="-122"/>
                 <a:cs typeface="Arial" pitchFamily="34" charset="-120"/>
               </a:rPr>
-              <a:t>Hybrid keyword and semantic search</a:t>
+              <a:t>Cited passages, opened in the UI</a:t>
             </a:r>
             <a:endParaRPr lang="en-US" sz="900" dirty="0"/>
           </a:p>
